--- a/CTG-CPM_Review2_Presentation.pptx
+++ b/CTG-CPM_Review2_Presentation.pptx
@@ -3276,7 +3276,7 @@
               </a:defRPr>
             </a:pPr>
             <a:r>
-              <a:t>Autonomous Predictive Maintenance using Generative AI, Game Theory &amp; Multi-Agent Orchestration</a:t>
+              <a:t>Predictive Maintenance Recommendation using Generative AI, Game Theory &amp; Multi-Agent Orchestration</a:t>
             </a:r>
           </a:p>
         </p:txBody>
@@ -4075,7 +4075,7 @@
               </a:defRPr>
             </a:pPr>
             <a:r>
-              <a:t>WHY GRAPHSAGE GNN VS. STANDARD CNNS?</a:t>
+              <a:t>WHY GNN VS. STANDARD CNNS?</a:t>
             </a:r>
           </a:p>
           <a:p>
@@ -4094,7 +4094,7 @@
               </a:defRPr>
             </a:pPr>
             <a:r>
-              <a:t>Network topology is inherently non-Euclidean; GraphSAGE models spatial node connectivity and cascading failure propagation.</a:t>
+              <a:t>Network topology is inherently non-Euclidean; our GNN (GCN or GraphSAGE, reported per run) models spatial node connectivity and cascading failure propagation.</a:t>
             </a:r>
           </a:p>
         </p:txBody>
@@ -4200,7 +4200,7 @@
               </a:defRPr>
             </a:pPr>
             <a:r>
-              <a:t>LLM prompting lacks safety guarantees; game theory provides mathematical proof of DSIC truthfulness and stable equilibrium.</a:t>
+              <a:t>Game theory provides formal guarantees (DSIC truthfulness, stable equilibrium) that heuristic prompting lacks.</a:t>
             </a:r>
           </a:p>
         </p:txBody>
@@ -4306,7 +4306,7 @@
               </a:defRPr>
             </a:pPr>
             <a:r>
-              <a:t>Groq LPU architecture yields 500+ tokens/sec, enabling sub-second LLM diagnosis (&lt; 1s latency) required for &lt; 10s MTTR.</a:t>
+              <a:t>Groq LPU offers fast LLM inference useful for the diagnostic step; it is additive to (not the whole) end-to-end MTTR.</a:t>
             </a:r>
           </a:p>
         </p:txBody>
@@ -4686,7 +4686,7 @@
               </a:defRPr>
             </a:pPr>
             <a:r>
-              <a:t>OPEX SAVINGS &amp; HARDWARE COST</a:t>
+              <a:t>POTENTIAL OPEX &amp; HARDWARE COST</a:t>
             </a:r>
           </a:p>
           <a:p>
@@ -4705,7 +4705,7 @@
               </a:defRPr>
             </a:pPr>
             <a:r>
-              <a:t>• 40% Reduction in Truck Rolls: Eliminates preemptive physical hardware replacements by finding configuration fixes.</a:t>
+              <a:t>• Potential Truck-Roll Reduction: May avoid physical hardware replacement by recommending configuration fixes (potential benefit, not measured).</a:t>
             </a:r>
           </a:p>
           <a:p>
@@ -4724,7 +4724,7 @@
               </a:defRPr>
             </a:pPr>
             <a:r>
-              <a:t>• Hardware Life Extension: E.g., optical laser bias adjustment extends transceiver operational lifespan by 6+ months.</a:t>
+              <a:t>• Possible Hardware Life Extension: E.g., optical laser bias adjustment might extend transceiver lifespan (not yet validated live).</a:t>
             </a:r>
           </a:p>
           <a:p>
@@ -4743,7 +4743,7 @@
               </a:defRPr>
             </a:pPr>
             <a:r>
-              <a:t>• Zero Physical Component Cost Increase: Uses existing telemetry streams (SNMP, gNMI, psutil) without new hardware sensors.</a:t>
+              <a:t>• No New Sensor Cost: Uses existing telemetry streams (SNMP, gNMI, psutil) without new hardware sensors.</a:t>
             </a:r>
           </a:p>
         </p:txBody>
@@ -4849,7 +4849,7 @@
               </a:defRPr>
             </a:pPr>
             <a:r>
-              <a:t>• Lightweight Inference: Distilled diffusion model and optimized GraphSAGE keep GPU compute costs minimal ($0.002 per remediation).</a:t>
+              <a:t>• Lightweight Inference: Distilled diffusion model and optimized GNN aim to keep GPU compute costs low (figure not yet benchmarked).</a:t>
             </a:r>
           </a:p>
           <a:p>
@@ -4868,7 +4868,7 @@
               </a:defRPr>
             </a:pPr>
             <a:r>
-              <a:t>• High ROI: Single prevented outage saves $50,000+ in SLA penalty fees and truck roll expenses.</a:t>
+              <a:t>• ROI: Cost-benefit depends on prevented outages; no dollar savings figure is claimed without live data.</a:t>
             </a:r>
           </a:p>
           <a:p>
@@ -5267,7 +5267,7 @@
               </a:defRPr>
             </a:pPr>
             <a:r>
-              <a:t>🌱  Carbon Footprint Reduction</a:t>
+              <a:t>🌱  Potential Carbon Footprint Reduction</a:t>
             </a:r>
           </a:p>
           <a:p>
@@ -5286,7 +5286,7 @@
               </a:defRPr>
             </a:pPr>
             <a:r>
-              <a:t>40% fewer technician truck rolls directly reduces diesel fuel consumption and greenhouse gas emissions from service vehicles.</a:t>
+              <a:t>Potentially fewer technician truck rolls could reduce fuel use from service vehicles (not yet measured).</a:t>
             </a:r>
           </a:p>
         </p:txBody>
@@ -5373,7 +5373,7 @@
               </a:defRPr>
             </a:pPr>
             <a:r>
-              <a:t>🌱  E-Waste Mitigation</a:t>
+              <a:t>🌱  E-Waste Mitigation (potential)</a:t>
             </a:r>
           </a:p>
           <a:p>
@@ -5392,7 +5392,7 @@
               </a:defRPr>
             </a:pPr>
             <a:r>
-              <a:t>Software-based self-healing extends electronic hardware life cycles, delaying premature electronic disposal and e-waste generation.</a:t>
+              <a:t>Software-based remediation could extend hardware life cycles, delaying premature e-waste generation.</a:t>
             </a:r>
           </a:p>
         </p:txBody>
@@ -5479,7 +5479,7 @@
               </a:defRPr>
             </a:pPr>
             <a:r>
-              <a:t>🌱  Critical Infrastructure Reliability</a:t>
+              <a:t>🌱  Reliability Support (potential)</a:t>
             </a:r>
           </a:p>
           <a:p>
@@ -5498,7 +5498,7 @@
               </a:defRPr>
             </a:pPr>
             <a:r>
-              <a:t>Sub-second MTTR ensures 99.999% SLA uptime for emergency services, 5G networks, cloud data centers, and enterprise IT.</a:t>
+              <a:t>Fast remediation recommendations could support higher SLA uptime; end-to-end MTTR is not yet claimed.</a:t>
             </a:r>
           </a:p>
         </p:txBody>
@@ -5585,7 +5585,7 @@
               </a:defRPr>
             </a:pPr>
             <a:r>
-              <a:t>🌱  Human Operator Well-being</a:t>
+              <a:t>🌱  Human Operator Support</a:t>
             </a:r>
           </a:p>
           <a:p>
@@ -5604,7 +5604,7 @@
               </a:defRPr>
             </a:pPr>
             <a:r>
-              <a:t>Transitions NOC engineers from stressful 24/7 manual alert firefighting to overseeing an autonomous self-healing system.</a:t>
+              <a:t>Transitions NOC engineers from manual alert firefighting toward overseeing recommended remediations.</a:t>
             </a:r>
           </a:p>
         </p:txBody>
@@ -7540,7 +7540,7 @@
               </a:defRPr>
             </a:pPr>
             <a:r>
-              <a:t>✓ Fully Operational Prototype with sub-second MTTR (&lt; 1ms execution time).</a:t>
+              <a:t>✓ Functional Prototype with fast in-process decision compute (&lt; a few ms, excludes LLM/deployment).</a:t>
             </a:r>
           </a:p>
           <a:p>
@@ -7578,7 +7578,7 @@
               </a:defRPr>
             </a:pPr>
             <a:r>
-              <a:t>✓ 100% Automated Test Suite Passing (5/5 unit &amp; integration tests).</a:t>
+              <a:t>✓ Automated Test Suite (5/5 unit &amp; integration tests).</a:t>
             </a:r>
           </a:p>
           <a:p>
@@ -7597,7 +7597,7 @@
               </a:defRPr>
             </a:pPr>
             <a:r>
-              <a:t>✓ LLM-Powered Step-by-Step Remediation Engine operational via Groq API.</a:t>
+              <a:t>✓ LLM-Powered Remediation Recommendation Engine via Groq API.</a:t>
             </a:r>
           </a:p>
         </p:txBody>
@@ -8159,7 +8159,7 @@
               </a:defRPr>
             </a:pPr>
             <a:r>
-              <a:t>CTG-CPM introduces a closed-loop self-healing network system combining:</a:t>
+              <a:t>CTG-CPM is a closed-loop predictive maintenance recommendation system combining:</a:t>
             </a:r>
           </a:p>
           <a:p>
@@ -9505,7 +9505,7 @@
               </a:defRPr>
             </a:pPr>
             <a:r>
-              <a:t>LAYER 5: AUTONOMOUS EXECUTION</a:t>
+              <a:t>LAYER 5: REMEDIATION RECOMMENDATION</a:t>
             </a:r>
           </a:p>
           <a:p>
@@ -9524,7 +9524,7 @@
               </a:defRPr>
             </a:pPr>
             <a:r>
-              <a:t>Digital Twin Verification, NETCONF/YANG &amp; PowerShell Script Deployment</a:t>
+              <a:t>Counterfactual projection selection; generates a recommended command (NOT auto-deployed)</a:t>
             </a:r>
           </a:p>
         </p:txBody>
@@ -9959,7 +9959,7 @@
               </a:defRPr>
             </a:pPr>
             <a:r>
-              <a:t>STAGE 1: DETECT (~1s)</a:t>
+              <a:t>STAGE 1: DETECT</a:t>
             </a:r>
           </a:p>
           <a:p>
@@ -10120,7 +10120,7 @@
               </a:defRPr>
             </a:pPr>
             <a:r>
-              <a:t>STAGE 2: GENERATE (~2s)</a:t>
+              <a:t>STAGE 2: GENERATE</a:t>
             </a:r>
           </a:p>
           <a:p>
@@ -10281,7 +10281,7 @@
               </a:defRPr>
             </a:pPr>
             <a:r>
-              <a:t>STAGE 3: SIMULATE (~2s)</a:t>
+              <a:t>STAGE 3: SELECT</a:t>
             </a:r>
           </a:p>
           <a:p>
@@ -10300,7 +10300,7 @@
               </a:defRPr>
             </a:pPr>
             <a:r>
-              <a:t>Agent 1 diagnoses root cause via Shapley Values; Agent 2 runs SPE Game &amp; VCG auction; Agent 3 tests in Digital Twin.</a:t>
+              <a:t>Agent 1 diagnoses root cause via Shapley Values; Agent 2 runs SPE Game &amp; VCG auction; Agent 3 selects candidate via counterfactual projection.</a:t>
             </a:r>
           </a:p>
         </p:txBody>
@@ -10442,7 +10442,7 @@
               </a:defRPr>
             </a:pPr>
             <a:r>
-              <a:t>STAGE 4: DEPLOY (~5s)</a:t>
+              <a:t>STAGE 4: RECOMMEND (NOT DEPLOYED)</a:t>
             </a:r>
           </a:p>
           <a:p>
@@ -10461,7 +10461,7 @@
               </a:defRPr>
             </a:pPr>
             <a:r>
-              <a:t>NETCONF/YANG &amp; PowerShell execution script pushed to live system with automated rollback protection.</a:t>
+              <a:t>Produces a recommended NETCONF/YANG &amp; PowerShell command. Auto-deployment is disabled in the prototype.</a:t>
             </a:r>
           </a:p>
         </p:txBody>
@@ -11080,7 +11080,7 @@
               </a:defRPr>
             </a:pPr>
             <a:r>
-              <a:t>• Dynamic Graphs: Topology refreshed every 60s to maintain digital twin sync.</a:t>
+              <a:t>• Dynamic Graphs: Topology refreshed periodically to keep node embeddings current.</a:t>
             </a:r>
           </a:p>
         </p:txBody>
@@ -12456,11 +12456,11 @@
             </a:r>
             <a:br/>
             <a:r>
-              <a:t>  'truck_roll_avoided': true,</a:t>
+              <a:t>  'truck_roll_avoided': 'potential (not measured)',</a:t>
             </a:r>
             <a:br/>
             <a:r>
-              <a:t>  'estimated_fix_time': '&lt; 10 seconds'</a:t>
+              <a:t>  'estimated_fix_time': 'decision compute only (excludes deployment)'</a:t>
             </a:r>
             <a:br/>
             <a:r>
@@ -13162,7 +13162,7 @@
               </a:defRPr>
             </a:pPr>
             <a:r>
-              <a:t>✓  100% Automated Test Pass</a:t>
+              <a:t>✓  Automated Test Suite</a:t>
             </a:r>
           </a:p>
           <a:p>
@@ -13181,7 +13181,7 @@
               </a:defRPr>
             </a:pPr>
             <a:r>
-              <a:t>Written test_prototype.py test suite covering all 5 core modules — 100% pass rate in 0.87s with MTTR &lt; 10s benchmark.</a:t>
+              <a:t>test_prototype.py unit/integration tests covering 5 core modules (Kafka test asserts honest status rather than emulating a broker).</a:t>
             </a:r>
           </a:p>
         </p:txBody>
@@ -14013,7 +14013,7 @@
               </a:defRPr>
             </a:pPr>
             <a:r>
-              <a:t>   CLI orchestrator (sub-second MTTR &lt; 1ms)</a:t>
+              <a:t>   CLI orchestrator (in-process decision compute)</a:t>
             </a:r>
           </a:p>
         </p:txBody>
